--- a/public/videos/repositories/midnight-spot-alert/midnight-spot-alert-tech-preview.pptx
+++ b/public/videos/repositories/midnight-spot-alert/midnight-spot-alert-tech-preview.pptx
@@ -134,7 +134,7 @@
           <p:cNvPr id="2" name="タイトル 1">
             <a:extLst>
               <a:ext uri="{FF2B5EF4-FFF2-40B4-BE49-F238E27FC236}">
-                <a16:creationId xmlns:a16="http://schemas.microsoft.com/office/drawing/2014/main" id="{996DB498-C088-A7B0-6182-D91CC93054DA}"/>
+                <a16:creationId xmlns:a16="http://schemas.microsoft.com/office/drawing/2014/main" id="{CA03DB04-8E6A-4F55-207F-42E534D7C274}"/>
               </a:ext>
             </a:extLst>
           </p:cNvPr>
@@ -171,7 +171,7 @@
           <p:cNvPr id="3" name="字幕 2">
             <a:extLst>
               <a:ext uri="{FF2B5EF4-FFF2-40B4-BE49-F238E27FC236}">
-                <a16:creationId xmlns:a16="http://schemas.microsoft.com/office/drawing/2014/main" id="{4E7CA18B-1055-6428-B727-006BC14D80F9}"/>
+                <a16:creationId xmlns:a16="http://schemas.microsoft.com/office/drawing/2014/main" id="{BFACEDAA-993D-08D7-98AE-7EB4CD270C7C}"/>
               </a:ext>
             </a:extLst>
           </p:cNvPr>
@@ -241,7 +241,7 @@
           <p:cNvPr id="4" name="日付プレースホルダー 3">
             <a:extLst>
               <a:ext uri="{FF2B5EF4-FFF2-40B4-BE49-F238E27FC236}">
-                <a16:creationId xmlns:a16="http://schemas.microsoft.com/office/drawing/2014/main" id="{E5C5F5B7-B4D3-E7B6-38FF-C533684429CA}"/>
+                <a16:creationId xmlns:a16="http://schemas.microsoft.com/office/drawing/2014/main" id="{09ED13C0-287C-9582-D1DE-7CFEFD4BE150}"/>
               </a:ext>
             </a:extLst>
           </p:cNvPr>
@@ -257,7 +257,7 @@
           <a:bodyPr/>
           <a:lstStyle/>
           <a:p>
-            <a:fld id="{66DDC502-97AF-48F9-ABC1-806ADDBCB28A}" type="datetimeFigureOut">
+            <a:fld id="{E14D2B25-2D47-4433-BA3F-60F12F8EA5F7}" type="datetimeFigureOut">
               <a:rPr kumimoji="1" lang="ja-JP" altLang="en-US" smtClean="0"/>
               <a:t>2026/7/30</a:t>
             </a:fld>
@@ -270,7 +270,7 @@
           <p:cNvPr id="5" name="フッター プレースホルダー 4">
             <a:extLst>
               <a:ext uri="{FF2B5EF4-FFF2-40B4-BE49-F238E27FC236}">
-                <a16:creationId xmlns:a16="http://schemas.microsoft.com/office/drawing/2014/main" id="{25252B96-800D-2D2E-1660-91708E154B2D}"/>
+                <a16:creationId xmlns:a16="http://schemas.microsoft.com/office/drawing/2014/main" id="{6AE9DE44-9B21-23C8-7F68-65F0D0DEF975}"/>
               </a:ext>
             </a:extLst>
           </p:cNvPr>
@@ -295,7 +295,7 @@
           <p:cNvPr id="6" name="スライド番号プレースホルダー 5">
             <a:extLst>
               <a:ext uri="{FF2B5EF4-FFF2-40B4-BE49-F238E27FC236}">
-                <a16:creationId xmlns:a16="http://schemas.microsoft.com/office/drawing/2014/main" id="{D177BD9B-1748-B57C-6745-E8ED192609D8}"/>
+                <a16:creationId xmlns:a16="http://schemas.microsoft.com/office/drawing/2014/main" id="{4E421D0E-668D-EC2B-C611-E91E833FC988}"/>
               </a:ext>
             </a:extLst>
           </p:cNvPr>
@@ -311,7 +311,7 @@
           <a:bodyPr/>
           <a:lstStyle/>
           <a:p>
-            <a:fld id="{DEDDB498-9CDC-4C91-9E4A-A27846179B04}" type="slidenum">
+            <a:fld id="{F75084DD-D2C1-44C7-BC8D-A39D9FDADE02}" type="slidenum">
               <a:rPr kumimoji="1" lang="ja-JP" altLang="en-US" smtClean="0"/>
               <a:t>‹#›</a:t>
             </a:fld>
@@ -322,7 +322,7 @@
     </p:spTree>
     <p:extLst>
       <p:ext uri="{BB962C8B-B14F-4D97-AF65-F5344CB8AC3E}">
-        <p14:creationId xmlns:p14="http://schemas.microsoft.com/office/powerpoint/2010/main" val="1577373150"/>
+        <p14:creationId xmlns:p14="http://schemas.microsoft.com/office/powerpoint/2010/main" val="269549904"/>
       </p:ext>
     </p:extLst>
   </p:cSld>
@@ -354,7 +354,7 @@
           <p:cNvPr id="2" name="タイトル 1">
             <a:extLst>
               <a:ext uri="{FF2B5EF4-FFF2-40B4-BE49-F238E27FC236}">
-                <a16:creationId xmlns:a16="http://schemas.microsoft.com/office/drawing/2014/main" id="{BFC60795-A6C5-265F-317C-7077DD4D1791}"/>
+                <a16:creationId xmlns:a16="http://schemas.microsoft.com/office/drawing/2014/main" id="{B2F652C4-A16C-0C0E-9FE3-20428E9BE519}"/>
               </a:ext>
             </a:extLst>
           </p:cNvPr>
@@ -382,7 +382,7 @@
           <p:cNvPr id="3" name="縦書きテキスト プレースホルダー 2">
             <a:extLst>
               <a:ext uri="{FF2B5EF4-FFF2-40B4-BE49-F238E27FC236}">
-                <a16:creationId xmlns:a16="http://schemas.microsoft.com/office/drawing/2014/main" id="{565574C7-DB60-6C88-ABDC-95F5F4C9417B}"/>
+                <a16:creationId xmlns:a16="http://schemas.microsoft.com/office/drawing/2014/main" id="{52097AC8-BD0C-D846-8404-A928BA7F4970}"/>
               </a:ext>
             </a:extLst>
           </p:cNvPr>
@@ -471,7 +471,7 @@
           <p:cNvPr id="4" name="日付プレースホルダー 3">
             <a:extLst>
               <a:ext uri="{FF2B5EF4-FFF2-40B4-BE49-F238E27FC236}">
-                <a16:creationId xmlns:a16="http://schemas.microsoft.com/office/drawing/2014/main" id="{1687C020-9E62-B8CC-360D-DC0A28A95D18}"/>
+                <a16:creationId xmlns:a16="http://schemas.microsoft.com/office/drawing/2014/main" id="{25C31E04-CC85-09C9-0B5A-815BE003AE9D}"/>
               </a:ext>
             </a:extLst>
           </p:cNvPr>
@@ -487,7 +487,7 @@
           <a:bodyPr/>
           <a:lstStyle/>
           <a:p>
-            <a:fld id="{66DDC502-97AF-48F9-ABC1-806ADDBCB28A}" type="datetimeFigureOut">
+            <a:fld id="{E14D2B25-2D47-4433-BA3F-60F12F8EA5F7}" type="datetimeFigureOut">
               <a:rPr kumimoji="1" lang="ja-JP" altLang="en-US" smtClean="0"/>
               <a:t>2026/7/30</a:t>
             </a:fld>
@@ -500,7 +500,7 @@
           <p:cNvPr id="5" name="フッター プレースホルダー 4">
             <a:extLst>
               <a:ext uri="{FF2B5EF4-FFF2-40B4-BE49-F238E27FC236}">
-                <a16:creationId xmlns:a16="http://schemas.microsoft.com/office/drawing/2014/main" id="{33291615-A565-95A6-5823-7E19CE66330C}"/>
+                <a16:creationId xmlns:a16="http://schemas.microsoft.com/office/drawing/2014/main" id="{31747E5E-B908-C239-362C-5A02A1633F80}"/>
               </a:ext>
             </a:extLst>
           </p:cNvPr>
@@ -525,7 +525,7 @@
           <p:cNvPr id="6" name="スライド番号プレースホルダー 5">
             <a:extLst>
               <a:ext uri="{FF2B5EF4-FFF2-40B4-BE49-F238E27FC236}">
-                <a16:creationId xmlns:a16="http://schemas.microsoft.com/office/drawing/2014/main" id="{3A572427-2E72-371E-9E4A-B03267660B90}"/>
+                <a16:creationId xmlns:a16="http://schemas.microsoft.com/office/drawing/2014/main" id="{959C5CA1-D7EB-7361-7FDB-FAE0DC105E9E}"/>
               </a:ext>
             </a:extLst>
           </p:cNvPr>
@@ -541,7 +541,7 @@
           <a:bodyPr/>
           <a:lstStyle/>
           <a:p>
-            <a:fld id="{DEDDB498-9CDC-4C91-9E4A-A27846179B04}" type="slidenum">
+            <a:fld id="{F75084DD-D2C1-44C7-BC8D-A39D9FDADE02}" type="slidenum">
               <a:rPr kumimoji="1" lang="ja-JP" altLang="en-US" smtClean="0"/>
               <a:t>‹#›</a:t>
             </a:fld>
@@ -552,7 +552,7 @@
     </p:spTree>
     <p:extLst>
       <p:ext uri="{BB962C8B-B14F-4D97-AF65-F5344CB8AC3E}">
-        <p14:creationId xmlns:p14="http://schemas.microsoft.com/office/powerpoint/2010/main" val="6725915"/>
+        <p14:creationId xmlns:p14="http://schemas.microsoft.com/office/powerpoint/2010/main" val="2105009516"/>
       </p:ext>
     </p:extLst>
   </p:cSld>
@@ -584,7 +584,7 @@
           <p:cNvPr id="2" name="縦書きタイトル 1">
             <a:extLst>
               <a:ext uri="{FF2B5EF4-FFF2-40B4-BE49-F238E27FC236}">
-                <a16:creationId xmlns:a16="http://schemas.microsoft.com/office/drawing/2014/main" id="{1FB8DEA5-CF45-4A0C-6768-046585AF6200}"/>
+                <a16:creationId xmlns:a16="http://schemas.microsoft.com/office/drawing/2014/main" id="{F550C471-7D1F-6981-4FD0-55FE3390C6C3}"/>
               </a:ext>
             </a:extLst>
           </p:cNvPr>
@@ -617,7 +617,7 @@
           <p:cNvPr id="3" name="縦書きテキスト プレースホルダー 2">
             <a:extLst>
               <a:ext uri="{FF2B5EF4-FFF2-40B4-BE49-F238E27FC236}">
-                <a16:creationId xmlns:a16="http://schemas.microsoft.com/office/drawing/2014/main" id="{FBF11E6D-DCE8-6C55-6EB3-30089560069D}"/>
+                <a16:creationId xmlns:a16="http://schemas.microsoft.com/office/drawing/2014/main" id="{1C3064E1-C1B6-BEAC-340F-219945441A6C}"/>
               </a:ext>
             </a:extLst>
           </p:cNvPr>
@@ -711,7 +711,7 @@
           <p:cNvPr id="4" name="日付プレースホルダー 3">
             <a:extLst>
               <a:ext uri="{FF2B5EF4-FFF2-40B4-BE49-F238E27FC236}">
-                <a16:creationId xmlns:a16="http://schemas.microsoft.com/office/drawing/2014/main" id="{FEFE1AAC-68C8-44F3-1180-E117021B80FA}"/>
+                <a16:creationId xmlns:a16="http://schemas.microsoft.com/office/drawing/2014/main" id="{3BCC70B0-F0A2-ED6E-AA98-582075411BD8}"/>
               </a:ext>
             </a:extLst>
           </p:cNvPr>
@@ -727,7 +727,7 @@
           <a:bodyPr/>
           <a:lstStyle/>
           <a:p>
-            <a:fld id="{66DDC502-97AF-48F9-ABC1-806ADDBCB28A}" type="datetimeFigureOut">
+            <a:fld id="{E14D2B25-2D47-4433-BA3F-60F12F8EA5F7}" type="datetimeFigureOut">
               <a:rPr kumimoji="1" lang="ja-JP" altLang="en-US" smtClean="0"/>
               <a:t>2026/7/30</a:t>
             </a:fld>
@@ -740,7 +740,7 @@
           <p:cNvPr id="5" name="フッター プレースホルダー 4">
             <a:extLst>
               <a:ext uri="{FF2B5EF4-FFF2-40B4-BE49-F238E27FC236}">
-                <a16:creationId xmlns:a16="http://schemas.microsoft.com/office/drawing/2014/main" id="{92C0F2F9-C86B-3BD2-7E60-C187DC013C79}"/>
+                <a16:creationId xmlns:a16="http://schemas.microsoft.com/office/drawing/2014/main" id="{BFDFB8AD-B1ED-0F85-3074-277E9D951981}"/>
               </a:ext>
             </a:extLst>
           </p:cNvPr>
@@ -765,7 +765,7 @@
           <p:cNvPr id="6" name="スライド番号プレースホルダー 5">
             <a:extLst>
               <a:ext uri="{FF2B5EF4-FFF2-40B4-BE49-F238E27FC236}">
-                <a16:creationId xmlns:a16="http://schemas.microsoft.com/office/drawing/2014/main" id="{3B4FDB2A-08BE-D00C-1609-12919222DEE9}"/>
+                <a16:creationId xmlns:a16="http://schemas.microsoft.com/office/drawing/2014/main" id="{3AFAD494-4965-C829-C557-3C6E3587D1FB}"/>
               </a:ext>
             </a:extLst>
           </p:cNvPr>
@@ -781,7 +781,7 @@
           <a:bodyPr/>
           <a:lstStyle/>
           <a:p>
-            <a:fld id="{DEDDB498-9CDC-4C91-9E4A-A27846179B04}" type="slidenum">
+            <a:fld id="{F75084DD-D2C1-44C7-BC8D-A39D9FDADE02}" type="slidenum">
               <a:rPr kumimoji="1" lang="ja-JP" altLang="en-US" smtClean="0"/>
               <a:t>‹#›</a:t>
             </a:fld>
@@ -792,7 +792,7 @@
     </p:spTree>
     <p:extLst>
       <p:ext uri="{BB962C8B-B14F-4D97-AF65-F5344CB8AC3E}">
-        <p14:creationId xmlns:p14="http://schemas.microsoft.com/office/powerpoint/2010/main" val="4173067982"/>
+        <p14:creationId xmlns:p14="http://schemas.microsoft.com/office/powerpoint/2010/main" val="3938732953"/>
       </p:ext>
     </p:extLst>
   </p:cSld>
@@ -824,7 +824,7 @@
           <p:cNvPr id="2" name="タイトル 1">
             <a:extLst>
               <a:ext uri="{FF2B5EF4-FFF2-40B4-BE49-F238E27FC236}">
-                <a16:creationId xmlns:a16="http://schemas.microsoft.com/office/drawing/2014/main" id="{09BC9252-D2EA-BD27-8F39-B41FA7A81F30}"/>
+                <a16:creationId xmlns:a16="http://schemas.microsoft.com/office/drawing/2014/main" id="{50E6771B-4D46-A823-0189-025412A95BEA}"/>
               </a:ext>
             </a:extLst>
           </p:cNvPr>
@@ -852,7 +852,7 @@
           <p:cNvPr id="3" name="コンテンツ プレースホルダー 2">
             <a:extLst>
               <a:ext uri="{FF2B5EF4-FFF2-40B4-BE49-F238E27FC236}">
-                <a16:creationId xmlns:a16="http://schemas.microsoft.com/office/drawing/2014/main" id="{349E4DE8-7C64-5EDA-2495-41EF68919FE0}"/>
+                <a16:creationId xmlns:a16="http://schemas.microsoft.com/office/drawing/2014/main" id="{D926B63D-E20D-BCC5-1C21-CF4A27D96828}"/>
               </a:ext>
             </a:extLst>
           </p:cNvPr>
@@ -941,7 +941,7 @@
           <p:cNvPr id="4" name="日付プレースホルダー 3">
             <a:extLst>
               <a:ext uri="{FF2B5EF4-FFF2-40B4-BE49-F238E27FC236}">
-                <a16:creationId xmlns:a16="http://schemas.microsoft.com/office/drawing/2014/main" id="{D38699CA-3E6B-51DC-2BEA-EF5CFBA1A6D6}"/>
+                <a16:creationId xmlns:a16="http://schemas.microsoft.com/office/drawing/2014/main" id="{5129DEBF-F780-07C9-BAAF-525CEFD48B1D}"/>
               </a:ext>
             </a:extLst>
           </p:cNvPr>
@@ -957,7 +957,7 @@
           <a:bodyPr/>
           <a:lstStyle/>
           <a:p>
-            <a:fld id="{66DDC502-97AF-48F9-ABC1-806ADDBCB28A}" type="datetimeFigureOut">
+            <a:fld id="{E14D2B25-2D47-4433-BA3F-60F12F8EA5F7}" type="datetimeFigureOut">
               <a:rPr kumimoji="1" lang="ja-JP" altLang="en-US" smtClean="0"/>
               <a:t>2026/7/30</a:t>
             </a:fld>
@@ -970,7 +970,7 @@
           <p:cNvPr id="5" name="フッター プレースホルダー 4">
             <a:extLst>
               <a:ext uri="{FF2B5EF4-FFF2-40B4-BE49-F238E27FC236}">
-                <a16:creationId xmlns:a16="http://schemas.microsoft.com/office/drawing/2014/main" id="{8088C7E5-2684-65F1-A8FA-2EC362A11605}"/>
+                <a16:creationId xmlns:a16="http://schemas.microsoft.com/office/drawing/2014/main" id="{9200020C-3DAC-2424-DF0A-0EB1AE5F078C}"/>
               </a:ext>
             </a:extLst>
           </p:cNvPr>
@@ -995,7 +995,7 @@
           <p:cNvPr id="6" name="スライド番号プレースホルダー 5">
             <a:extLst>
               <a:ext uri="{FF2B5EF4-FFF2-40B4-BE49-F238E27FC236}">
-                <a16:creationId xmlns:a16="http://schemas.microsoft.com/office/drawing/2014/main" id="{D3FDE912-A754-80D9-3F6A-10A1CBDB34D8}"/>
+                <a16:creationId xmlns:a16="http://schemas.microsoft.com/office/drawing/2014/main" id="{FFB26B62-E2C1-BB0A-31EF-9478433CC69B}"/>
               </a:ext>
             </a:extLst>
           </p:cNvPr>
@@ -1011,7 +1011,7 @@
           <a:bodyPr/>
           <a:lstStyle/>
           <a:p>
-            <a:fld id="{DEDDB498-9CDC-4C91-9E4A-A27846179B04}" type="slidenum">
+            <a:fld id="{F75084DD-D2C1-44C7-BC8D-A39D9FDADE02}" type="slidenum">
               <a:rPr kumimoji="1" lang="ja-JP" altLang="en-US" smtClean="0"/>
               <a:t>‹#›</a:t>
             </a:fld>
@@ -1022,7 +1022,7 @@
     </p:spTree>
     <p:extLst>
       <p:ext uri="{BB962C8B-B14F-4D97-AF65-F5344CB8AC3E}">
-        <p14:creationId xmlns:p14="http://schemas.microsoft.com/office/powerpoint/2010/main" val="4259915938"/>
+        <p14:creationId xmlns:p14="http://schemas.microsoft.com/office/powerpoint/2010/main" val="3429587662"/>
       </p:ext>
     </p:extLst>
   </p:cSld>
@@ -1054,7 +1054,7 @@
           <p:cNvPr id="2" name="タイトル 1">
             <a:extLst>
               <a:ext uri="{FF2B5EF4-FFF2-40B4-BE49-F238E27FC236}">
-                <a16:creationId xmlns:a16="http://schemas.microsoft.com/office/drawing/2014/main" id="{841B09EA-D10C-4BD0-CC37-01F1691BD289}"/>
+                <a16:creationId xmlns:a16="http://schemas.microsoft.com/office/drawing/2014/main" id="{B8A4D85B-3A55-295F-B592-199271CECBFE}"/>
               </a:ext>
             </a:extLst>
           </p:cNvPr>
@@ -1091,7 +1091,7 @@
           <p:cNvPr id="3" name="テキスト プレースホルダー 2">
             <a:extLst>
               <a:ext uri="{FF2B5EF4-FFF2-40B4-BE49-F238E27FC236}">
-                <a16:creationId xmlns:a16="http://schemas.microsoft.com/office/drawing/2014/main" id="{7E7E1C99-6310-A0CF-3B79-97176FD56797}"/>
+                <a16:creationId xmlns:a16="http://schemas.microsoft.com/office/drawing/2014/main" id="{7C8D5EF6-1B9B-AC57-9335-C27867CB46DC}"/>
               </a:ext>
             </a:extLst>
           </p:cNvPr>
@@ -1216,7 +1216,7 @@
           <p:cNvPr id="4" name="日付プレースホルダー 3">
             <a:extLst>
               <a:ext uri="{FF2B5EF4-FFF2-40B4-BE49-F238E27FC236}">
-                <a16:creationId xmlns:a16="http://schemas.microsoft.com/office/drawing/2014/main" id="{A36DD3A4-9EC1-57F8-69C5-F98B1BF6AF2C}"/>
+                <a16:creationId xmlns:a16="http://schemas.microsoft.com/office/drawing/2014/main" id="{EFB6D237-2252-F903-BF54-D77940A94C70}"/>
               </a:ext>
             </a:extLst>
           </p:cNvPr>
@@ -1232,7 +1232,7 @@
           <a:bodyPr/>
           <a:lstStyle/>
           <a:p>
-            <a:fld id="{66DDC502-97AF-48F9-ABC1-806ADDBCB28A}" type="datetimeFigureOut">
+            <a:fld id="{E14D2B25-2D47-4433-BA3F-60F12F8EA5F7}" type="datetimeFigureOut">
               <a:rPr kumimoji="1" lang="ja-JP" altLang="en-US" smtClean="0"/>
               <a:t>2026/7/30</a:t>
             </a:fld>
@@ -1245,7 +1245,7 @@
           <p:cNvPr id="5" name="フッター プレースホルダー 4">
             <a:extLst>
               <a:ext uri="{FF2B5EF4-FFF2-40B4-BE49-F238E27FC236}">
-                <a16:creationId xmlns:a16="http://schemas.microsoft.com/office/drawing/2014/main" id="{2CD31DE7-B469-7D04-E4EA-8844B637EB2A}"/>
+                <a16:creationId xmlns:a16="http://schemas.microsoft.com/office/drawing/2014/main" id="{A8A4FB69-641D-075E-1BE2-C0F72F873123}"/>
               </a:ext>
             </a:extLst>
           </p:cNvPr>
@@ -1270,7 +1270,7 @@
           <p:cNvPr id="6" name="スライド番号プレースホルダー 5">
             <a:extLst>
               <a:ext uri="{FF2B5EF4-FFF2-40B4-BE49-F238E27FC236}">
-                <a16:creationId xmlns:a16="http://schemas.microsoft.com/office/drawing/2014/main" id="{D7EFEB9C-3C2C-8A97-28C1-D37D98DB2063}"/>
+                <a16:creationId xmlns:a16="http://schemas.microsoft.com/office/drawing/2014/main" id="{6B3F9C82-8752-2CE9-E4FF-EADA45666E1C}"/>
               </a:ext>
             </a:extLst>
           </p:cNvPr>
@@ -1286,7 +1286,7 @@
           <a:bodyPr/>
           <a:lstStyle/>
           <a:p>
-            <a:fld id="{DEDDB498-9CDC-4C91-9E4A-A27846179B04}" type="slidenum">
+            <a:fld id="{F75084DD-D2C1-44C7-BC8D-A39D9FDADE02}" type="slidenum">
               <a:rPr kumimoji="1" lang="ja-JP" altLang="en-US" smtClean="0"/>
               <a:t>‹#›</a:t>
             </a:fld>
@@ -1297,7 +1297,7 @@
     </p:spTree>
     <p:extLst>
       <p:ext uri="{BB962C8B-B14F-4D97-AF65-F5344CB8AC3E}">
-        <p14:creationId xmlns:p14="http://schemas.microsoft.com/office/powerpoint/2010/main" val="2802195767"/>
+        <p14:creationId xmlns:p14="http://schemas.microsoft.com/office/powerpoint/2010/main" val="291136782"/>
       </p:ext>
     </p:extLst>
   </p:cSld>
@@ -1329,7 +1329,7 @@
           <p:cNvPr id="2" name="タイトル 1">
             <a:extLst>
               <a:ext uri="{FF2B5EF4-FFF2-40B4-BE49-F238E27FC236}">
-                <a16:creationId xmlns:a16="http://schemas.microsoft.com/office/drawing/2014/main" id="{1CA02470-04F5-2FCE-B34F-CD01B69714BA}"/>
+                <a16:creationId xmlns:a16="http://schemas.microsoft.com/office/drawing/2014/main" id="{9FE72B0F-AE7F-7AA4-19E3-584444088C42}"/>
               </a:ext>
             </a:extLst>
           </p:cNvPr>
@@ -1357,7 +1357,7 @@
           <p:cNvPr id="3" name="コンテンツ プレースホルダー 2">
             <a:extLst>
               <a:ext uri="{FF2B5EF4-FFF2-40B4-BE49-F238E27FC236}">
-                <a16:creationId xmlns:a16="http://schemas.microsoft.com/office/drawing/2014/main" id="{0A44F6A3-58E7-6F6A-A47A-237C8DD2EA3C}"/>
+                <a16:creationId xmlns:a16="http://schemas.microsoft.com/office/drawing/2014/main" id="{4DD754F6-48C6-42C5-D5C4-B0AA945B3237}"/>
               </a:ext>
             </a:extLst>
           </p:cNvPr>
@@ -1451,7 +1451,7 @@
           <p:cNvPr id="4" name="コンテンツ プレースホルダー 3">
             <a:extLst>
               <a:ext uri="{FF2B5EF4-FFF2-40B4-BE49-F238E27FC236}">
-                <a16:creationId xmlns:a16="http://schemas.microsoft.com/office/drawing/2014/main" id="{0D44E0E7-65D0-27AD-402D-6A966D11FB09}"/>
+                <a16:creationId xmlns:a16="http://schemas.microsoft.com/office/drawing/2014/main" id="{2F206CC7-5210-3C60-E733-ACFD5196820F}"/>
               </a:ext>
             </a:extLst>
           </p:cNvPr>
@@ -1545,7 +1545,7 @@
           <p:cNvPr id="5" name="日付プレースホルダー 4">
             <a:extLst>
               <a:ext uri="{FF2B5EF4-FFF2-40B4-BE49-F238E27FC236}">
-                <a16:creationId xmlns:a16="http://schemas.microsoft.com/office/drawing/2014/main" id="{ACADF0A0-5A13-8E70-331E-6834F668C516}"/>
+                <a16:creationId xmlns:a16="http://schemas.microsoft.com/office/drawing/2014/main" id="{5E76CF97-DA05-87CA-A4EA-FE5358372C99}"/>
               </a:ext>
             </a:extLst>
           </p:cNvPr>
@@ -1561,7 +1561,7 @@
           <a:bodyPr/>
           <a:lstStyle/>
           <a:p>
-            <a:fld id="{66DDC502-97AF-48F9-ABC1-806ADDBCB28A}" type="datetimeFigureOut">
+            <a:fld id="{E14D2B25-2D47-4433-BA3F-60F12F8EA5F7}" type="datetimeFigureOut">
               <a:rPr kumimoji="1" lang="ja-JP" altLang="en-US" smtClean="0"/>
               <a:t>2026/7/30</a:t>
             </a:fld>
@@ -1574,7 +1574,7 @@
           <p:cNvPr id="6" name="フッター プレースホルダー 5">
             <a:extLst>
               <a:ext uri="{FF2B5EF4-FFF2-40B4-BE49-F238E27FC236}">
-                <a16:creationId xmlns:a16="http://schemas.microsoft.com/office/drawing/2014/main" id="{27C54413-F98B-732F-0021-C63AFDB44936}"/>
+                <a16:creationId xmlns:a16="http://schemas.microsoft.com/office/drawing/2014/main" id="{3D09DE6D-973D-72BB-CA74-B9393B77AF3B}"/>
               </a:ext>
             </a:extLst>
           </p:cNvPr>
@@ -1599,7 +1599,7 @@
           <p:cNvPr id="7" name="スライド番号プレースホルダー 6">
             <a:extLst>
               <a:ext uri="{FF2B5EF4-FFF2-40B4-BE49-F238E27FC236}">
-                <a16:creationId xmlns:a16="http://schemas.microsoft.com/office/drawing/2014/main" id="{F7FDEA08-B901-2368-A344-79F386D0249D}"/>
+                <a16:creationId xmlns:a16="http://schemas.microsoft.com/office/drawing/2014/main" id="{218745C1-5C6B-795D-A545-D103B2BC4AA6}"/>
               </a:ext>
             </a:extLst>
           </p:cNvPr>
@@ -1615,7 +1615,7 @@
           <a:bodyPr/>
           <a:lstStyle/>
           <a:p>
-            <a:fld id="{DEDDB498-9CDC-4C91-9E4A-A27846179B04}" type="slidenum">
+            <a:fld id="{F75084DD-D2C1-44C7-BC8D-A39D9FDADE02}" type="slidenum">
               <a:rPr kumimoji="1" lang="ja-JP" altLang="en-US" smtClean="0"/>
               <a:t>‹#›</a:t>
             </a:fld>
@@ -1626,7 +1626,7 @@
     </p:spTree>
     <p:extLst>
       <p:ext uri="{BB962C8B-B14F-4D97-AF65-F5344CB8AC3E}">
-        <p14:creationId xmlns:p14="http://schemas.microsoft.com/office/powerpoint/2010/main" val="1962158019"/>
+        <p14:creationId xmlns:p14="http://schemas.microsoft.com/office/powerpoint/2010/main" val="1277280259"/>
       </p:ext>
     </p:extLst>
   </p:cSld>
@@ -1658,7 +1658,7 @@
           <p:cNvPr id="2" name="タイトル 1">
             <a:extLst>
               <a:ext uri="{FF2B5EF4-FFF2-40B4-BE49-F238E27FC236}">
-                <a16:creationId xmlns:a16="http://schemas.microsoft.com/office/drawing/2014/main" id="{283DF9CB-73AE-6D3D-F1FF-DD59E623888C}"/>
+                <a16:creationId xmlns:a16="http://schemas.microsoft.com/office/drawing/2014/main" id="{4EDA4538-C39B-98CB-F27C-D1905E4DF858}"/>
               </a:ext>
             </a:extLst>
           </p:cNvPr>
@@ -1691,7 +1691,7 @@
           <p:cNvPr id="3" name="テキスト プレースホルダー 2">
             <a:extLst>
               <a:ext uri="{FF2B5EF4-FFF2-40B4-BE49-F238E27FC236}">
-                <a16:creationId xmlns:a16="http://schemas.microsoft.com/office/drawing/2014/main" id="{C383422E-CC6A-7490-7153-7064DEDF0609}"/>
+                <a16:creationId xmlns:a16="http://schemas.microsoft.com/office/drawing/2014/main" id="{8A8D7646-65A5-AAD1-DB34-ECFC7FC30B70}"/>
               </a:ext>
             </a:extLst>
           </p:cNvPr>
@@ -1762,7 +1762,7 @@
           <p:cNvPr id="4" name="コンテンツ プレースホルダー 3">
             <a:extLst>
               <a:ext uri="{FF2B5EF4-FFF2-40B4-BE49-F238E27FC236}">
-                <a16:creationId xmlns:a16="http://schemas.microsoft.com/office/drawing/2014/main" id="{E5E10600-A039-0FD3-9742-0E04004AA06D}"/>
+                <a16:creationId xmlns:a16="http://schemas.microsoft.com/office/drawing/2014/main" id="{F92CEBF3-6FA7-C748-EA99-71373EBBA621}"/>
               </a:ext>
             </a:extLst>
           </p:cNvPr>
@@ -1856,7 +1856,7 @@
           <p:cNvPr id="5" name="テキスト プレースホルダー 4">
             <a:extLst>
               <a:ext uri="{FF2B5EF4-FFF2-40B4-BE49-F238E27FC236}">
-                <a16:creationId xmlns:a16="http://schemas.microsoft.com/office/drawing/2014/main" id="{A343EAA8-3DAD-D6C6-BD79-587E66700129}"/>
+                <a16:creationId xmlns:a16="http://schemas.microsoft.com/office/drawing/2014/main" id="{908A3E4E-1F42-14D8-FB29-1766B9CAF74F}"/>
               </a:ext>
             </a:extLst>
           </p:cNvPr>
@@ -1927,7 +1927,7 @@
           <p:cNvPr id="6" name="コンテンツ プレースホルダー 5">
             <a:extLst>
               <a:ext uri="{FF2B5EF4-FFF2-40B4-BE49-F238E27FC236}">
-                <a16:creationId xmlns:a16="http://schemas.microsoft.com/office/drawing/2014/main" id="{C0B558CB-5A1C-C70D-477F-0A5555AC3112}"/>
+                <a16:creationId xmlns:a16="http://schemas.microsoft.com/office/drawing/2014/main" id="{D0D66EB2-2065-4F40-0BBE-40DC6E2B2E8A}"/>
               </a:ext>
             </a:extLst>
           </p:cNvPr>
@@ -2021,7 +2021,7 @@
           <p:cNvPr id="7" name="日付プレースホルダー 6">
             <a:extLst>
               <a:ext uri="{FF2B5EF4-FFF2-40B4-BE49-F238E27FC236}">
-                <a16:creationId xmlns:a16="http://schemas.microsoft.com/office/drawing/2014/main" id="{045B3F34-96BB-16AF-993E-B31A69C418C5}"/>
+                <a16:creationId xmlns:a16="http://schemas.microsoft.com/office/drawing/2014/main" id="{749FF9EE-38A3-1607-A405-96BE5FE49CBC}"/>
               </a:ext>
             </a:extLst>
           </p:cNvPr>
@@ -2037,7 +2037,7 @@
           <a:bodyPr/>
           <a:lstStyle/>
           <a:p>
-            <a:fld id="{66DDC502-97AF-48F9-ABC1-806ADDBCB28A}" type="datetimeFigureOut">
+            <a:fld id="{E14D2B25-2D47-4433-BA3F-60F12F8EA5F7}" type="datetimeFigureOut">
               <a:rPr kumimoji="1" lang="ja-JP" altLang="en-US" smtClean="0"/>
               <a:t>2026/7/30</a:t>
             </a:fld>
@@ -2050,7 +2050,7 @@
           <p:cNvPr id="8" name="フッター プレースホルダー 7">
             <a:extLst>
               <a:ext uri="{FF2B5EF4-FFF2-40B4-BE49-F238E27FC236}">
-                <a16:creationId xmlns:a16="http://schemas.microsoft.com/office/drawing/2014/main" id="{330490B3-5AC3-DCF2-0DAB-E44C6B011BD3}"/>
+                <a16:creationId xmlns:a16="http://schemas.microsoft.com/office/drawing/2014/main" id="{AE0011F3-BA62-1A2C-5D8A-0204C8D18072}"/>
               </a:ext>
             </a:extLst>
           </p:cNvPr>
@@ -2075,7 +2075,7 @@
           <p:cNvPr id="9" name="スライド番号プレースホルダー 8">
             <a:extLst>
               <a:ext uri="{FF2B5EF4-FFF2-40B4-BE49-F238E27FC236}">
-                <a16:creationId xmlns:a16="http://schemas.microsoft.com/office/drawing/2014/main" id="{6C3338CA-9F94-DFB8-97CD-44DDFE72ADEF}"/>
+                <a16:creationId xmlns:a16="http://schemas.microsoft.com/office/drawing/2014/main" id="{7F9D47DC-1AEC-05F8-08FC-639E63EE90DE}"/>
               </a:ext>
             </a:extLst>
           </p:cNvPr>
@@ -2091,7 +2091,7 @@
           <a:bodyPr/>
           <a:lstStyle/>
           <a:p>
-            <a:fld id="{DEDDB498-9CDC-4C91-9E4A-A27846179B04}" type="slidenum">
+            <a:fld id="{F75084DD-D2C1-44C7-BC8D-A39D9FDADE02}" type="slidenum">
               <a:rPr kumimoji="1" lang="ja-JP" altLang="en-US" smtClean="0"/>
               <a:t>‹#›</a:t>
             </a:fld>
@@ -2102,7 +2102,7 @@
     </p:spTree>
     <p:extLst>
       <p:ext uri="{BB962C8B-B14F-4D97-AF65-F5344CB8AC3E}">
-        <p14:creationId xmlns:p14="http://schemas.microsoft.com/office/powerpoint/2010/main" val="2373088879"/>
+        <p14:creationId xmlns:p14="http://schemas.microsoft.com/office/powerpoint/2010/main" val="4036550560"/>
       </p:ext>
     </p:extLst>
   </p:cSld>
@@ -2134,7 +2134,7 @@
           <p:cNvPr id="2" name="タイトル 1">
             <a:extLst>
               <a:ext uri="{FF2B5EF4-FFF2-40B4-BE49-F238E27FC236}">
-                <a16:creationId xmlns:a16="http://schemas.microsoft.com/office/drawing/2014/main" id="{AD410132-DFDE-0944-1607-CDB497F25041}"/>
+                <a16:creationId xmlns:a16="http://schemas.microsoft.com/office/drawing/2014/main" id="{CF3D172B-0707-D53F-15E7-150982F87FE4}"/>
               </a:ext>
             </a:extLst>
           </p:cNvPr>
@@ -2162,7 +2162,7 @@
           <p:cNvPr id="3" name="日付プレースホルダー 2">
             <a:extLst>
               <a:ext uri="{FF2B5EF4-FFF2-40B4-BE49-F238E27FC236}">
-                <a16:creationId xmlns:a16="http://schemas.microsoft.com/office/drawing/2014/main" id="{795EC1A7-B8BB-149D-9950-EE8F7FA1241E}"/>
+                <a16:creationId xmlns:a16="http://schemas.microsoft.com/office/drawing/2014/main" id="{E932D602-563F-51A2-23EA-C914D8B445A8}"/>
               </a:ext>
             </a:extLst>
           </p:cNvPr>
@@ -2178,7 +2178,7 @@
           <a:bodyPr/>
           <a:lstStyle/>
           <a:p>
-            <a:fld id="{66DDC502-97AF-48F9-ABC1-806ADDBCB28A}" type="datetimeFigureOut">
+            <a:fld id="{E14D2B25-2D47-4433-BA3F-60F12F8EA5F7}" type="datetimeFigureOut">
               <a:rPr kumimoji="1" lang="ja-JP" altLang="en-US" smtClean="0"/>
               <a:t>2026/7/30</a:t>
             </a:fld>
@@ -2191,7 +2191,7 @@
           <p:cNvPr id="4" name="フッター プレースホルダー 3">
             <a:extLst>
               <a:ext uri="{FF2B5EF4-FFF2-40B4-BE49-F238E27FC236}">
-                <a16:creationId xmlns:a16="http://schemas.microsoft.com/office/drawing/2014/main" id="{F6790A89-B918-903A-EFD1-B39765DCB029}"/>
+                <a16:creationId xmlns:a16="http://schemas.microsoft.com/office/drawing/2014/main" id="{F5E129CC-A136-5FDF-2C88-B7509FA57BDD}"/>
               </a:ext>
             </a:extLst>
           </p:cNvPr>
@@ -2216,7 +2216,7 @@
           <p:cNvPr id="5" name="スライド番号プレースホルダー 4">
             <a:extLst>
               <a:ext uri="{FF2B5EF4-FFF2-40B4-BE49-F238E27FC236}">
-                <a16:creationId xmlns:a16="http://schemas.microsoft.com/office/drawing/2014/main" id="{5CAD720C-4BC0-E95F-4205-703755AB76D0}"/>
+                <a16:creationId xmlns:a16="http://schemas.microsoft.com/office/drawing/2014/main" id="{1D7074FC-7775-20FB-B16C-69F709F8656E}"/>
               </a:ext>
             </a:extLst>
           </p:cNvPr>
@@ -2232,7 +2232,7 @@
           <a:bodyPr/>
           <a:lstStyle/>
           <a:p>
-            <a:fld id="{DEDDB498-9CDC-4C91-9E4A-A27846179B04}" type="slidenum">
+            <a:fld id="{F75084DD-D2C1-44C7-BC8D-A39D9FDADE02}" type="slidenum">
               <a:rPr kumimoji="1" lang="ja-JP" altLang="en-US" smtClean="0"/>
               <a:t>‹#›</a:t>
             </a:fld>
@@ -2243,7 +2243,7 @@
     </p:spTree>
     <p:extLst>
       <p:ext uri="{BB962C8B-B14F-4D97-AF65-F5344CB8AC3E}">
-        <p14:creationId xmlns:p14="http://schemas.microsoft.com/office/powerpoint/2010/main" val="1618044127"/>
+        <p14:creationId xmlns:p14="http://schemas.microsoft.com/office/powerpoint/2010/main" val="2403968480"/>
       </p:ext>
     </p:extLst>
   </p:cSld>
@@ -2275,7 +2275,7 @@
           <p:cNvPr id="2" name="日付プレースホルダー 1">
             <a:extLst>
               <a:ext uri="{FF2B5EF4-FFF2-40B4-BE49-F238E27FC236}">
-                <a16:creationId xmlns:a16="http://schemas.microsoft.com/office/drawing/2014/main" id="{A3B28FFD-FDA1-E88E-3BB7-54D063CFAB83}"/>
+                <a16:creationId xmlns:a16="http://schemas.microsoft.com/office/drawing/2014/main" id="{59640D65-84E2-5C39-4685-4A908F5DEAED}"/>
               </a:ext>
             </a:extLst>
           </p:cNvPr>
@@ -2291,7 +2291,7 @@
           <a:bodyPr/>
           <a:lstStyle/>
           <a:p>
-            <a:fld id="{66DDC502-97AF-48F9-ABC1-806ADDBCB28A}" type="datetimeFigureOut">
+            <a:fld id="{E14D2B25-2D47-4433-BA3F-60F12F8EA5F7}" type="datetimeFigureOut">
               <a:rPr kumimoji="1" lang="ja-JP" altLang="en-US" smtClean="0"/>
               <a:t>2026/7/30</a:t>
             </a:fld>
@@ -2304,7 +2304,7 @@
           <p:cNvPr id="3" name="フッター プレースホルダー 2">
             <a:extLst>
               <a:ext uri="{FF2B5EF4-FFF2-40B4-BE49-F238E27FC236}">
-                <a16:creationId xmlns:a16="http://schemas.microsoft.com/office/drawing/2014/main" id="{97407307-9872-1893-C853-76026092490D}"/>
+                <a16:creationId xmlns:a16="http://schemas.microsoft.com/office/drawing/2014/main" id="{9128F85C-F3BC-5896-C978-02ADF04F65A9}"/>
               </a:ext>
             </a:extLst>
           </p:cNvPr>
@@ -2329,7 +2329,7 @@
           <p:cNvPr id="4" name="スライド番号プレースホルダー 3">
             <a:extLst>
               <a:ext uri="{FF2B5EF4-FFF2-40B4-BE49-F238E27FC236}">
-                <a16:creationId xmlns:a16="http://schemas.microsoft.com/office/drawing/2014/main" id="{6360A59D-817A-A7E8-300F-2CDCBB9F3E90}"/>
+                <a16:creationId xmlns:a16="http://schemas.microsoft.com/office/drawing/2014/main" id="{0DF19B64-CFDE-3BF0-1C72-66B25299020D}"/>
               </a:ext>
             </a:extLst>
           </p:cNvPr>
@@ -2345,7 +2345,7 @@
           <a:bodyPr/>
           <a:lstStyle/>
           <a:p>
-            <a:fld id="{DEDDB498-9CDC-4C91-9E4A-A27846179B04}" type="slidenum">
+            <a:fld id="{F75084DD-D2C1-44C7-BC8D-A39D9FDADE02}" type="slidenum">
               <a:rPr kumimoji="1" lang="ja-JP" altLang="en-US" smtClean="0"/>
               <a:t>‹#›</a:t>
             </a:fld>
@@ -2356,7 +2356,7 @@
     </p:spTree>
     <p:extLst>
       <p:ext uri="{BB962C8B-B14F-4D97-AF65-F5344CB8AC3E}">
-        <p14:creationId xmlns:p14="http://schemas.microsoft.com/office/powerpoint/2010/main" val="91245378"/>
+        <p14:creationId xmlns:p14="http://schemas.microsoft.com/office/powerpoint/2010/main" val="2536907458"/>
       </p:ext>
     </p:extLst>
   </p:cSld>
@@ -2388,7 +2388,7 @@
           <p:cNvPr id="2" name="タイトル 1">
             <a:extLst>
               <a:ext uri="{FF2B5EF4-FFF2-40B4-BE49-F238E27FC236}">
-                <a16:creationId xmlns:a16="http://schemas.microsoft.com/office/drawing/2014/main" id="{3AC0C41B-EFCB-51DF-95AF-1C3D04527AC5}"/>
+                <a16:creationId xmlns:a16="http://schemas.microsoft.com/office/drawing/2014/main" id="{06398E99-6C06-DC1C-0D59-81353962401A}"/>
               </a:ext>
             </a:extLst>
           </p:cNvPr>
@@ -2425,7 +2425,7 @@
           <p:cNvPr id="3" name="コンテンツ プレースホルダー 2">
             <a:extLst>
               <a:ext uri="{FF2B5EF4-FFF2-40B4-BE49-F238E27FC236}">
-                <a16:creationId xmlns:a16="http://schemas.microsoft.com/office/drawing/2014/main" id="{8DA93292-C35C-4F2E-1AAE-633F08A15C71}"/>
+                <a16:creationId xmlns:a16="http://schemas.microsoft.com/office/drawing/2014/main" id="{6909A25F-AC2B-F798-D9F5-038AE3F88429}"/>
               </a:ext>
             </a:extLst>
           </p:cNvPr>
@@ -2547,7 +2547,7 @@
           <p:cNvPr id="4" name="テキスト プレースホルダー 3">
             <a:extLst>
               <a:ext uri="{FF2B5EF4-FFF2-40B4-BE49-F238E27FC236}">
-                <a16:creationId xmlns:a16="http://schemas.microsoft.com/office/drawing/2014/main" id="{E5D366F9-A81D-06E7-6446-EBCFBE6D6482}"/>
+                <a16:creationId xmlns:a16="http://schemas.microsoft.com/office/drawing/2014/main" id="{B37FD394-561C-BA3F-8DD4-BE9E2C8DC3ED}"/>
               </a:ext>
             </a:extLst>
           </p:cNvPr>
@@ -2618,7 +2618,7 @@
           <p:cNvPr id="5" name="日付プレースホルダー 4">
             <a:extLst>
               <a:ext uri="{FF2B5EF4-FFF2-40B4-BE49-F238E27FC236}">
-                <a16:creationId xmlns:a16="http://schemas.microsoft.com/office/drawing/2014/main" id="{63BAF149-2649-50B2-6148-A06A22763BD1}"/>
+                <a16:creationId xmlns:a16="http://schemas.microsoft.com/office/drawing/2014/main" id="{3D9E1D84-7008-3B11-AF78-C46C5A0DDAF3}"/>
               </a:ext>
             </a:extLst>
           </p:cNvPr>
@@ -2634,7 +2634,7 @@
           <a:bodyPr/>
           <a:lstStyle/>
           <a:p>
-            <a:fld id="{66DDC502-97AF-48F9-ABC1-806ADDBCB28A}" type="datetimeFigureOut">
+            <a:fld id="{E14D2B25-2D47-4433-BA3F-60F12F8EA5F7}" type="datetimeFigureOut">
               <a:rPr kumimoji="1" lang="ja-JP" altLang="en-US" smtClean="0"/>
               <a:t>2026/7/30</a:t>
             </a:fld>
@@ -2647,7 +2647,7 @@
           <p:cNvPr id="6" name="フッター プレースホルダー 5">
             <a:extLst>
               <a:ext uri="{FF2B5EF4-FFF2-40B4-BE49-F238E27FC236}">
-                <a16:creationId xmlns:a16="http://schemas.microsoft.com/office/drawing/2014/main" id="{8655DFE1-A96B-8336-EFE8-9E858F95884F}"/>
+                <a16:creationId xmlns:a16="http://schemas.microsoft.com/office/drawing/2014/main" id="{734307E4-9F6D-7E88-E034-F527E0411D71}"/>
               </a:ext>
             </a:extLst>
           </p:cNvPr>
@@ -2672,7 +2672,7 @@
           <p:cNvPr id="7" name="スライド番号プレースホルダー 6">
             <a:extLst>
               <a:ext uri="{FF2B5EF4-FFF2-40B4-BE49-F238E27FC236}">
-                <a16:creationId xmlns:a16="http://schemas.microsoft.com/office/drawing/2014/main" id="{06544343-6213-6DD2-DDC8-6502C5DFC925}"/>
+                <a16:creationId xmlns:a16="http://schemas.microsoft.com/office/drawing/2014/main" id="{75E13EE7-6EB3-1A2C-6237-C31B59AC9FAE}"/>
               </a:ext>
             </a:extLst>
           </p:cNvPr>
@@ -2688,7 +2688,7 @@
           <a:bodyPr/>
           <a:lstStyle/>
           <a:p>
-            <a:fld id="{DEDDB498-9CDC-4C91-9E4A-A27846179B04}" type="slidenum">
+            <a:fld id="{F75084DD-D2C1-44C7-BC8D-A39D9FDADE02}" type="slidenum">
               <a:rPr kumimoji="1" lang="ja-JP" altLang="en-US" smtClean="0"/>
               <a:t>‹#›</a:t>
             </a:fld>
@@ -2699,7 +2699,7 @@
     </p:spTree>
     <p:extLst>
       <p:ext uri="{BB962C8B-B14F-4D97-AF65-F5344CB8AC3E}">
-        <p14:creationId xmlns:p14="http://schemas.microsoft.com/office/powerpoint/2010/main" val="3013601860"/>
+        <p14:creationId xmlns:p14="http://schemas.microsoft.com/office/powerpoint/2010/main" val="1459702070"/>
       </p:ext>
     </p:extLst>
   </p:cSld>
@@ -2731,7 +2731,7 @@
           <p:cNvPr id="2" name="タイトル 1">
             <a:extLst>
               <a:ext uri="{FF2B5EF4-FFF2-40B4-BE49-F238E27FC236}">
-                <a16:creationId xmlns:a16="http://schemas.microsoft.com/office/drawing/2014/main" id="{A20D6BED-D145-21B4-744B-84B460CD363F}"/>
+                <a16:creationId xmlns:a16="http://schemas.microsoft.com/office/drawing/2014/main" id="{D6403E06-964B-F4C9-2D3C-D1843B868FA3}"/>
               </a:ext>
             </a:extLst>
           </p:cNvPr>
@@ -2768,7 +2768,7 @@
           <p:cNvPr id="3" name="図プレースホルダー 2">
             <a:extLst>
               <a:ext uri="{FF2B5EF4-FFF2-40B4-BE49-F238E27FC236}">
-                <a16:creationId xmlns:a16="http://schemas.microsoft.com/office/drawing/2014/main" id="{91233D71-A248-0928-8E62-909F801836C4}"/>
+                <a16:creationId xmlns:a16="http://schemas.microsoft.com/office/drawing/2014/main" id="{0360EB10-88C0-D31C-5D6E-2A1777B18E77}"/>
               </a:ext>
             </a:extLst>
           </p:cNvPr>
@@ -2835,7 +2835,7 @@
           <p:cNvPr id="4" name="テキスト プレースホルダー 3">
             <a:extLst>
               <a:ext uri="{FF2B5EF4-FFF2-40B4-BE49-F238E27FC236}">
-                <a16:creationId xmlns:a16="http://schemas.microsoft.com/office/drawing/2014/main" id="{51DD1305-98DD-DD81-42D2-0A6ABD1F57C9}"/>
+                <a16:creationId xmlns:a16="http://schemas.microsoft.com/office/drawing/2014/main" id="{EDC053F3-F379-4718-58D2-4E0CFC13E9A3}"/>
               </a:ext>
             </a:extLst>
           </p:cNvPr>
@@ -2906,7 +2906,7 @@
           <p:cNvPr id="5" name="日付プレースホルダー 4">
             <a:extLst>
               <a:ext uri="{FF2B5EF4-FFF2-40B4-BE49-F238E27FC236}">
-                <a16:creationId xmlns:a16="http://schemas.microsoft.com/office/drawing/2014/main" id="{52FE32DA-7D65-FA34-3B4A-C672AC50ED6C}"/>
+                <a16:creationId xmlns:a16="http://schemas.microsoft.com/office/drawing/2014/main" id="{0F153D9F-2F63-836C-225D-ADCE3EC2CE31}"/>
               </a:ext>
             </a:extLst>
           </p:cNvPr>
@@ -2922,7 +2922,7 @@
           <a:bodyPr/>
           <a:lstStyle/>
           <a:p>
-            <a:fld id="{66DDC502-97AF-48F9-ABC1-806ADDBCB28A}" type="datetimeFigureOut">
+            <a:fld id="{E14D2B25-2D47-4433-BA3F-60F12F8EA5F7}" type="datetimeFigureOut">
               <a:rPr kumimoji="1" lang="ja-JP" altLang="en-US" smtClean="0"/>
               <a:t>2026/7/30</a:t>
             </a:fld>
@@ -2935,7 +2935,7 @@
           <p:cNvPr id="6" name="フッター プレースホルダー 5">
             <a:extLst>
               <a:ext uri="{FF2B5EF4-FFF2-40B4-BE49-F238E27FC236}">
-                <a16:creationId xmlns:a16="http://schemas.microsoft.com/office/drawing/2014/main" id="{84003106-87C2-96C6-6BB5-6D7CB2B96FFF}"/>
+                <a16:creationId xmlns:a16="http://schemas.microsoft.com/office/drawing/2014/main" id="{E2C88F8A-7EAB-5B4E-E04B-ED2E8A5727D6}"/>
               </a:ext>
             </a:extLst>
           </p:cNvPr>
@@ -2960,7 +2960,7 @@
           <p:cNvPr id="7" name="スライド番号プレースホルダー 6">
             <a:extLst>
               <a:ext uri="{FF2B5EF4-FFF2-40B4-BE49-F238E27FC236}">
-                <a16:creationId xmlns:a16="http://schemas.microsoft.com/office/drawing/2014/main" id="{C7DEF1D2-2B27-1643-5768-F65E3C92E242}"/>
+                <a16:creationId xmlns:a16="http://schemas.microsoft.com/office/drawing/2014/main" id="{F30C6360-81D2-80FD-D043-E317BAB5ED89}"/>
               </a:ext>
             </a:extLst>
           </p:cNvPr>
@@ -2976,7 +2976,7 @@
           <a:bodyPr/>
           <a:lstStyle/>
           <a:p>
-            <a:fld id="{DEDDB498-9CDC-4C91-9E4A-A27846179B04}" type="slidenum">
+            <a:fld id="{F75084DD-D2C1-44C7-BC8D-A39D9FDADE02}" type="slidenum">
               <a:rPr kumimoji="1" lang="ja-JP" altLang="en-US" smtClean="0"/>
               <a:t>‹#›</a:t>
             </a:fld>
@@ -2987,7 +2987,7 @@
     </p:spTree>
     <p:extLst>
       <p:ext uri="{BB962C8B-B14F-4D97-AF65-F5344CB8AC3E}">
-        <p14:creationId xmlns:p14="http://schemas.microsoft.com/office/powerpoint/2010/main" val="3988642841"/>
+        <p14:creationId xmlns:p14="http://schemas.microsoft.com/office/powerpoint/2010/main" val="1679136067"/>
       </p:ext>
     </p:extLst>
   </p:cSld>
@@ -3024,7 +3024,7 @@
           <p:cNvPr id="2" name="タイトル プレースホルダー 1">
             <a:extLst>
               <a:ext uri="{FF2B5EF4-FFF2-40B4-BE49-F238E27FC236}">
-                <a16:creationId xmlns:a16="http://schemas.microsoft.com/office/drawing/2014/main" id="{D97CBC5A-7816-3E88-75BF-18C7722D134C}"/>
+                <a16:creationId xmlns:a16="http://schemas.microsoft.com/office/drawing/2014/main" id="{20D71166-615F-AE92-4828-D5518626EA65}"/>
               </a:ext>
             </a:extLst>
           </p:cNvPr>
@@ -3062,7 +3062,7 @@
           <p:cNvPr id="3" name="テキスト プレースホルダー 2">
             <a:extLst>
               <a:ext uri="{FF2B5EF4-FFF2-40B4-BE49-F238E27FC236}">
-                <a16:creationId xmlns:a16="http://schemas.microsoft.com/office/drawing/2014/main" id="{E3EE759F-01B3-C8A5-87F1-22ECC03BB57C}"/>
+                <a16:creationId xmlns:a16="http://schemas.microsoft.com/office/drawing/2014/main" id="{329CE55A-7DDD-F528-A056-2E634CC8BBD2}"/>
               </a:ext>
             </a:extLst>
           </p:cNvPr>
@@ -3161,7 +3161,7 @@
           <p:cNvPr id="4" name="日付プレースホルダー 3">
             <a:extLst>
               <a:ext uri="{FF2B5EF4-FFF2-40B4-BE49-F238E27FC236}">
-                <a16:creationId xmlns:a16="http://schemas.microsoft.com/office/drawing/2014/main" id="{4688FE82-631A-2C21-599B-09BFE59C1279}"/>
+                <a16:creationId xmlns:a16="http://schemas.microsoft.com/office/drawing/2014/main" id="{3E79B456-43DE-08D3-DE30-9EAC435BB881}"/>
               </a:ext>
             </a:extLst>
           </p:cNvPr>
@@ -3195,7 +3195,7 @@
             </a:lvl1pPr>
           </a:lstStyle>
           <a:p>
-            <a:fld id="{66DDC502-97AF-48F9-ABC1-806ADDBCB28A}" type="datetimeFigureOut">
+            <a:fld id="{E14D2B25-2D47-4433-BA3F-60F12F8EA5F7}" type="datetimeFigureOut">
               <a:rPr kumimoji="1" lang="ja-JP" altLang="en-US" smtClean="0"/>
               <a:t>2026/7/30</a:t>
             </a:fld>
@@ -3208,7 +3208,7 @@
           <p:cNvPr id="5" name="フッター プレースホルダー 4">
             <a:extLst>
               <a:ext uri="{FF2B5EF4-FFF2-40B4-BE49-F238E27FC236}">
-                <a16:creationId xmlns:a16="http://schemas.microsoft.com/office/drawing/2014/main" id="{F801488F-964D-55BB-8D6A-523C64C0E816}"/>
+                <a16:creationId xmlns:a16="http://schemas.microsoft.com/office/drawing/2014/main" id="{A3B934B1-C2E7-FB73-A1B1-5DDBF9662001}"/>
               </a:ext>
             </a:extLst>
           </p:cNvPr>
@@ -3251,7 +3251,7 @@
           <p:cNvPr id="6" name="スライド番号プレースホルダー 5">
             <a:extLst>
               <a:ext uri="{FF2B5EF4-FFF2-40B4-BE49-F238E27FC236}">
-                <a16:creationId xmlns:a16="http://schemas.microsoft.com/office/drawing/2014/main" id="{9101CC32-741D-BECE-AB88-87554ECE40E2}"/>
+                <a16:creationId xmlns:a16="http://schemas.microsoft.com/office/drawing/2014/main" id="{41679E75-3024-E73F-793E-9F275DA1291C}"/>
               </a:ext>
             </a:extLst>
           </p:cNvPr>
@@ -3285,7 +3285,7 @@
             </a:lvl1pPr>
           </a:lstStyle>
           <a:p>
-            <a:fld id="{DEDDB498-9CDC-4C91-9E4A-A27846179B04}" type="slidenum">
+            <a:fld id="{F75084DD-D2C1-44C7-BC8D-A39D9FDADE02}" type="slidenum">
               <a:rPr kumimoji="1" lang="ja-JP" altLang="en-US" smtClean="0"/>
               <a:t>‹#›</a:t>
             </a:fld>
@@ -3296,7 +3296,7 @@
     </p:spTree>
     <p:extLst>
       <p:ext uri="{BB962C8B-B14F-4D97-AF65-F5344CB8AC3E}">
-        <p14:creationId xmlns:p14="http://schemas.microsoft.com/office/powerpoint/2010/main" val="3121164135"/>
+        <p14:creationId xmlns:p14="http://schemas.microsoft.com/office/powerpoint/2010/main" val="1918895585"/>
       </p:ext>
     </p:extLst>
   </p:cSld>
@@ -3619,7 +3619,7 @@
           <p:cNvPr id="2" name="テキスト ボックス 1">
             <a:extLst>
               <a:ext uri="{FF2B5EF4-FFF2-40B4-BE49-F238E27FC236}">
-                <a16:creationId xmlns:a16="http://schemas.microsoft.com/office/drawing/2014/main" id="{4BE94862-C5AD-C132-24E6-1948714BAEF8}"/>
+                <a16:creationId xmlns:a16="http://schemas.microsoft.com/office/drawing/2014/main" id="{452060A8-0ABD-19FF-D8BF-19E54D873249}"/>
               </a:ext>
             </a:extLst>
           </p:cNvPr>
@@ -3665,7 +3665,7 @@
           <p:cNvPr id="3" name="テキスト ボックス 2">
             <a:extLst>
               <a:ext uri="{FF2B5EF4-FFF2-40B4-BE49-F238E27FC236}">
-                <a16:creationId xmlns:a16="http://schemas.microsoft.com/office/drawing/2014/main" id="{732F1235-7DFA-8DBC-A684-597928D695C3}"/>
+                <a16:creationId xmlns:a16="http://schemas.microsoft.com/office/drawing/2014/main" id="{3E618873-0F84-82BD-F919-1FCE964DDB5F}"/>
               </a:ext>
             </a:extLst>
           </p:cNvPr>
@@ -3714,7 +3714,7 @@
           <p:cNvPr id="4" name="テキスト ボックス 3">
             <a:extLst>
               <a:ext uri="{FF2B5EF4-FFF2-40B4-BE49-F238E27FC236}">
-                <a16:creationId xmlns:a16="http://schemas.microsoft.com/office/drawing/2014/main" id="{79E565EC-8D97-FD3B-9CD0-6F6D9D0D4E4E}"/>
+                <a16:creationId xmlns:a16="http://schemas.microsoft.com/office/drawing/2014/main" id="{1D8EA621-21EF-C220-E96A-77F0FE039E62}"/>
               </a:ext>
             </a:extLst>
           </p:cNvPr>
@@ -3754,7 +3754,7 @@
           <p:cNvPr id="5" name="テキスト ボックス 4">
             <a:extLst>
               <a:ext uri="{FF2B5EF4-FFF2-40B4-BE49-F238E27FC236}">
-                <a16:creationId xmlns:a16="http://schemas.microsoft.com/office/drawing/2014/main" id="{DE5E62B3-D652-5AB6-C9DE-1E6BE81A6F73}"/>
+                <a16:creationId xmlns:a16="http://schemas.microsoft.com/office/drawing/2014/main" id="{B9AA3554-2579-8587-4275-F4B0AC962AC9}"/>
               </a:ext>
             </a:extLst>
           </p:cNvPr>
@@ -3801,7 +3801,7 @@
             <a:hlinkClick r:id="" action="ppaction://media"/>
             <a:extLst>
               <a:ext uri="{FF2B5EF4-FFF2-40B4-BE49-F238E27FC236}">
-                <a16:creationId xmlns:a16="http://schemas.microsoft.com/office/drawing/2014/main" id="{DE8B1C04-E94A-85C4-B5F1-52CEBE1D761A}"/>
+                <a16:creationId xmlns:a16="http://schemas.microsoft.com/office/drawing/2014/main" id="{9A85ACA6-9D56-2A8A-DBC2-8E4F35E4363E}"/>
               </a:ext>
             </a:extLst>
           </p:cNvPr>
@@ -3836,7 +3836,7 @@
     </p:spTree>
     <p:extLst>
       <p:ext uri="{BB962C8B-B14F-4D97-AF65-F5344CB8AC3E}">
-        <p14:creationId xmlns:p14="http://schemas.microsoft.com/office/powerpoint/2010/main" val="537394975"/>
+        <p14:creationId xmlns:p14="http://schemas.microsoft.com/office/powerpoint/2010/main" val="981808509"/>
       </p:ext>
     </p:extLst>
   </p:cSld>
@@ -3960,7 +3960,7 @@
           <p:cNvPr id="2" name="テキスト ボックス 1">
             <a:extLst>
               <a:ext uri="{FF2B5EF4-FFF2-40B4-BE49-F238E27FC236}">
-                <a16:creationId xmlns:a16="http://schemas.microsoft.com/office/drawing/2014/main" id="{6E73BFDB-F917-860A-725C-9743403A4B45}"/>
+                <a16:creationId xmlns:a16="http://schemas.microsoft.com/office/drawing/2014/main" id="{9A40C52F-B6BB-B9C4-9CAE-872A7DAADF4A}"/>
               </a:ext>
             </a:extLst>
           </p:cNvPr>
@@ -4006,7 +4006,7 @@
           <p:cNvPr id="3" name="テキスト ボックス 2">
             <a:extLst>
               <a:ext uri="{FF2B5EF4-FFF2-40B4-BE49-F238E27FC236}">
-                <a16:creationId xmlns:a16="http://schemas.microsoft.com/office/drawing/2014/main" id="{F1985DDE-2128-BBD5-A859-336D4B009096}"/>
+                <a16:creationId xmlns:a16="http://schemas.microsoft.com/office/drawing/2014/main" id="{45AE7C9E-A2F7-5C41-500A-B5170238B4EF}"/>
               </a:ext>
             </a:extLst>
           </p:cNvPr>
@@ -4046,7 +4046,7 @@
           <p:cNvPr id="4" name="テキスト ボックス 3">
             <a:extLst>
               <a:ext uri="{FF2B5EF4-FFF2-40B4-BE49-F238E27FC236}">
-                <a16:creationId xmlns:a16="http://schemas.microsoft.com/office/drawing/2014/main" id="{F96FD0AA-32BD-583E-328E-174286DF5CCD}"/>
+                <a16:creationId xmlns:a16="http://schemas.microsoft.com/office/drawing/2014/main" id="{855CF257-8A63-48E6-3E7E-EED4FFFD4DE6}"/>
               </a:ext>
             </a:extLst>
           </p:cNvPr>
@@ -4110,7 +4110,7 @@
           <p:cNvPr id="5" name="テキスト ボックス 4">
             <a:extLst>
               <a:ext uri="{FF2B5EF4-FFF2-40B4-BE49-F238E27FC236}">
-                <a16:creationId xmlns:a16="http://schemas.microsoft.com/office/drawing/2014/main" id="{D12153C9-FB28-55BB-AB3C-EE8CAD5FA0EB}"/>
+                <a16:creationId xmlns:a16="http://schemas.microsoft.com/office/drawing/2014/main" id="{25E0B794-A63B-EE10-34C5-FFFF206CF04F}"/>
               </a:ext>
             </a:extLst>
           </p:cNvPr>
@@ -4157,7 +4157,7 @@
             <a:hlinkClick r:id="" action="ppaction://media"/>
             <a:extLst>
               <a:ext uri="{FF2B5EF4-FFF2-40B4-BE49-F238E27FC236}">
-                <a16:creationId xmlns:a16="http://schemas.microsoft.com/office/drawing/2014/main" id="{308947F2-4831-0E38-6327-553EE0F1F26B}"/>
+                <a16:creationId xmlns:a16="http://schemas.microsoft.com/office/drawing/2014/main" id="{6B7567A6-0FB2-5416-B256-3D3C0EDAA008}"/>
               </a:ext>
             </a:extLst>
           </p:cNvPr>
@@ -4192,7 +4192,7 @@
     </p:spTree>
     <p:extLst>
       <p:ext uri="{BB962C8B-B14F-4D97-AF65-F5344CB8AC3E}">
-        <p14:creationId xmlns:p14="http://schemas.microsoft.com/office/powerpoint/2010/main" val="1391370375"/>
+        <p14:creationId xmlns:p14="http://schemas.microsoft.com/office/powerpoint/2010/main" val="1029105929"/>
       </p:ext>
     </p:extLst>
   </p:cSld>
@@ -4316,7 +4316,7 @@
           <p:cNvPr id="2" name="テキスト ボックス 1">
             <a:extLst>
               <a:ext uri="{FF2B5EF4-FFF2-40B4-BE49-F238E27FC236}">
-                <a16:creationId xmlns:a16="http://schemas.microsoft.com/office/drawing/2014/main" id="{693CA50C-CBAB-2A0A-F4F9-62280A10F70D}"/>
+                <a16:creationId xmlns:a16="http://schemas.microsoft.com/office/drawing/2014/main" id="{193346A8-0E09-5B6B-BD33-08BCEB502EB1}"/>
               </a:ext>
             </a:extLst>
           </p:cNvPr>
@@ -4362,7 +4362,7 @@
           <p:cNvPr id="3" name="テキスト ボックス 2">
             <a:extLst>
               <a:ext uri="{FF2B5EF4-FFF2-40B4-BE49-F238E27FC236}">
-                <a16:creationId xmlns:a16="http://schemas.microsoft.com/office/drawing/2014/main" id="{5EF24C5E-FC48-72D0-E745-D3B3B512D765}"/>
+                <a16:creationId xmlns:a16="http://schemas.microsoft.com/office/drawing/2014/main" id="{F56465F7-8B8C-10DC-6732-30A6A9B61DA1}"/>
               </a:ext>
             </a:extLst>
           </p:cNvPr>
@@ -4402,7 +4402,7 @@
           <p:cNvPr id="4" name="テキスト ボックス 3">
             <a:extLst>
               <a:ext uri="{FF2B5EF4-FFF2-40B4-BE49-F238E27FC236}">
-                <a16:creationId xmlns:a16="http://schemas.microsoft.com/office/drawing/2014/main" id="{0E4B0A89-60C8-A94B-C9DF-0117B5B484F9}"/>
+                <a16:creationId xmlns:a16="http://schemas.microsoft.com/office/drawing/2014/main" id="{AE3A124D-6683-B818-C8AF-CD366841E2BC}"/>
               </a:ext>
             </a:extLst>
           </p:cNvPr>
@@ -4497,7 +4497,7 @@
           <p:cNvPr id="5" name="テキスト ボックス 4">
             <a:extLst>
               <a:ext uri="{FF2B5EF4-FFF2-40B4-BE49-F238E27FC236}">
-                <a16:creationId xmlns:a16="http://schemas.microsoft.com/office/drawing/2014/main" id="{D9D55DCC-C365-B671-BBB4-570AAF064976}"/>
+                <a16:creationId xmlns:a16="http://schemas.microsoft.com/office/drawing/2014/main" id="{450A8609-99D8-3706-C884-2E50C3911FA1}"/>
               </a:ext>
             </a:extLst>
           </p:cNvPr>
@@ -4544,7 +4544,7 @@
             <a:hlinkClick r:id="" action="ppaction://media"/>
             <a:extLst>
               <a:ext uri="{FF2B5EF4-FFF2-40B4-BE49-F238E27FC236}">
-                <a16:creationId xmlns:a16="http://schemas.microsoft.com/office/drawing/2014/main" id="{EB48B5FE-8EE2-03B6-6228-91B938754771}"/>
+                <a16:creationId xmlns:a16="http://schemas.microsoft.com/office/drawing/2014/main" id="{2685A0B7-6259-8F6B-ADD0-07F9EFE7CF05}"/>
               </a:ext>
             </a:extLst>
           </p:cNvPr>
@@ -4579,7 +4579,7 @@
     </p:spTree>
     <p:extLst>
       <p:ext uri="{BB962C8B-B14F-4D97-AF65-F5344CB8AC3E}">
-        <p14:creationId xmlns:p14="http://schemas.microsoft.com/office/powerpoint/2010/main" val="155372662"/>
+        <p14:creationId xmlns:p14="http://schemas.microsoft.com/office/powerpoint/2010/main" val="3524820394"/>
       </p:ext>
     </p:extLst>
   </p:cSld>
@@ -4703,7 +4703,7 @@
           <p:cNvPr id="2" name="テキスト ボックス 1">
             <a:extLst>
               <a:ext uri="{FF2B5EF4-FFF2-40B4-BE49-F238E27FC236}">
-                <a16:creationId xmlns:a16="http://schemas.microsoft.com/office/drawing/2014/main" id="{0B9CC9F1-B339-7135-761F-D07B84CEC174}"/>
+                <a16:creationId xmlns:a16="http://schemas.microsoft.com/office/drawing/2014/main" id="{107ADA91-0294-0AD7-33F7-F3C9EE070870}"/>
               </a:ext>
             </a:extLst>
           </p:cNvPr>
@@ -4749,7 +4749,7 @@
           <p:cNvPr id="3" name="テキスト ボックス 2">
             <a:extLst>
               <a:ext uri="{FF2B5EF4-FFF2-40B4-BE49-F238E27FC236}">
-                <a16:creationId xmlns:a16="http://schemas.microsoft.com/office/drawing/2014/main" id="{F931BE40-6214-7103-EFDE-CD8A8A13FE18}"/>
+                <a16:creationId xmlns:a16="http://schemas.microsoft.com/office/drawing/2014/main" id="{33FE864B-9E23-53F6-ECCE-FF44BD944B60}"/>
               </a:ext>
             </a:extLst>
           </p:cNvPr>
@@ -4789,7 +4789,7 @@
           <p:cNvPr id="4" name="テキスト ボックス 3">
             <a:extLst>
               <a:ext uri="{FF2B5EF4-FFF2-40B4-BE49-F238E27FC236}">
-                <a16:creationId xmlns:a16="http://schemas.microsoft.com/office/drawing/2014/main" id="{85BE1B13-FE29-D381-DD4B-982B6789A577}"/>
+                <a16:creationId xmlns:a16="http://schemas.microsoft.com/office/drawing/2014/main" id="{234FB375-52E1-F37A-93A0-2F7D8C71DC48}"/>
               </a:ext>
             </a:extLst>
           </p:cNvPr>
@@ -4899,7 +4899,7 @@
           <p:cNvPr id="5" name="テキスト ボックス 4">
             <a:extLst>
               <a:ext uri="{FF2B5EF4-FFF2-40B4-BE49-F238E27FC236}">
-                <a16:creationId xmlns:a16="http://schemas.microsoft.com/office/drawing/2014/main" id="{A140F8E6-0D26-B804-3680-CD4B53389A5B}"/>
+                <a16:creationId xmlns:a16="http://schemas.microsoft.com/office/drawing/2014/main" id="{732EDC51-ED2A-1102-E87A-493D85F443E4}"/>
               </a:ext>
             </a:extLst>
           </p:cNvPr>
@@ -4946,7 +4946,7 @@
             <a:hlinkClick r:id="" action="ppaction://media"/>
             <a:extLst>
               <a:ext uri="{FF2B5EF4-FFF2-40B4-BE49-F238E27FC236}">
-                <a16:creationId xmlns:a16="http://schemas.microsoft.com/office/drawing/2014/main" id="{33D4B7D6-A728-4E63-F9D2-5A76EDE96A18}"/>
+                <a16:creationId xmlns:a16="http://schemas.microsoft.com/office/drawing/2014/main" id="{C5414181-B582-E471-D86E-91DBE07591E0}"/>
               </a:ext>
             </a:extLst>
           </p:cNvPr>
@@ -4981,7 +4981,7 @@
     </p:spTree>
     <p:extLst>
       <p:ext uri="{BB962C8B-B14F-4D97-AF65-F5344CB8AC3E}">
-        <p14:creationId xmlns:p14="http://schemas.microsoft.com/office/powerpoint/2010/main" val="1860316355"/>
+        <p14:creationId xmlns:p14="http://schemas.microsoft.com/office/powerpoint/2010/main" val="3480888369"/>
       </p:ext>
     </p:extLst>
   </p:cSld>
@@ -5105,7 +5105,7 @@
           <p:cNvPr id="2" name="テキスト ボックス 1">
             <a:extLst>
               <a:ext uri="{FF2B5EF4-FFF2-40B4-BE49-F238E27FC236}">
-                <a16:creationId xmlns:a16="http://schemas.microsoft.com/office/drawing/2014/main" id="{F38DB937-D3D9-61E8-1928-5A11D7820B8F}"/>
+                <a16:creationId xmlns:a16="http://schemas.microsoft.com/office/drawing/2014/main" id="{F35BF2A6-A4C8-151E-F426-9EF639C7C7F6}"/>
               </a:ext>
             </a:extLst>
           </p:cNvPr>
@@ -5151,7 +5151,7 @@
           <p:cNvPr id="3" name="テキスト ボックス 2">
             <a:extLst>
               <a:ext uri="{FF2B5EF4-FFF2-40B4-BE49-F238E27FC236}">
-                <a16:creationId xmlns:a16="http://schemas.microsoft.com/office/drawing/2014/main" id="{5CA86296-9B2A-EDDC-E040-AF17102DBDC5}"/>
+                <a16:creationId xmlns:a16="http://schemas.microsoft.com/office/drawing/2014/main" id="{453CFF21-99A9-78B9-C420-6BBCCC0FD426}"/>
               </a:ext>
             </a:extLst>
           </p:cNvPr>
@@ -5191,7 +5191,7 @@
           <p:cNvPr id="4" name="テキスト ボックス 3">
             <a:extLst>
               <a:ext uri="{FF2B5EF4-FFF2-40B4-BE49-F238E27FC236}">
-                <a16:creationId xmlns:a16="http://schemas.microsoft.com/office/drawing/2014/main" id="{F62ACF29-9F0F-2813-B900-B4DD145E90CF}"/>
+                <a16:creationId xmlns:a16="http://schemas.microsoft.com/office/drawing/2014/main" id="{68AEA26A-F6E4-D21C-4F04-5FD31C30244E}"/>
               </a:ext>
             </a:extLst>
           </p:cNvPr>
@@ -5215,20 +5215,14 @@
           <a:lstStyle/>
           <a:p>
             <a:r>
-              <a:rPr kumimoji="1" lang="en-US" altLang="ja-JP" sz="2000">
+              <a:rPr kumimoji="1" lang="ja-JP" altLang="en-US" sz="2000">
                 <a:solidFill>
                   <a:srgbClr val="333333"/>
                 </a:solidFill>
                 <a:latin typeface="Arial" panose="020B0604020202020204" pitchFamily="34" charset="0"/>
               </a:rPr>
-              <a:t>Set confirmed custom domain</a:t>
-            </a:r>
-            <a:endParaRPr kumimoji="1" lang="ja-JP" altLang="en-US" sz="2000">
-              <a:solidFill>
-                <a:srgbClr val="333333"/>
-              </a:solidFill>
-              <a:latin typeface="Arial" panose="020B0604020202020204" pitchFamily="34" charset="0"/>
-            </a:endParaRPr>
+              <a:t>直近のコミットでは、実装の見直しと継続的な改善が行われました。</a:t>
+            </a:r>
           </a:p>
         </p:txBody>
       </p:sp>
@@ -5237,7 +5231,7 @@
           <p:cNvPr id="5" name="テキスト ボックス 4">
             <a:extLst>
               <a:ext uri="{FF2B5EF4-FFF2-40B4-BE49-F238E27FC236}">
-                <a16:creationId xmlns:a16="http://schemas.microsoft.com/office/drawing/2014/main" id="{A95EA111-5FFD-95ED-D84C-286BC334CDCF}"/>
+                <a16:creationId xmlns:a16="http://schemas.microsoft.com/office/drawing/2014/main" id="{C9ACAEF6-414F-D776-29D6-232F250038FB}"/>
               </a:ext>
             </a:extLst>
           </p:cNvPr>
@@ -5284,7 +5278,7 @@
             <a:hlinkClick r:id="" action="ppaction://media"/>
             <a:extLst>
               <a:ext uri="{FF2B5EF4-FFF2-40B4-BE49-F238E27FC236}">
-                <a16:creationId xmlns:a16="http://schemas.microsoft.com/office/drawing/2014/main" id="{90631DC3-85B9-F23D-3DDC-C0100ADB4691}"/>
+                <a16:creationId xmlns:a16="http://schemas.microsoft.com/office/drawing/2014/main" id="{4655918C-D968-3011-141E-77ED031DC4B6}"/>
               </a:ext>
             </a:extLst>
           </p:cNvPr>
@@ -5319,7 +5313,7 @@
     </p:spTree>
     <p:extLst>
       <p:ext uri="{BB962C8B-B14F-4D97-AF65-F5344CB8AC3E}">
-        <p14:creationId xmlns:p14="http://schemas.microsoft.com/office/powerpoint/2010/main" val="3271787048"/>
+        <p14:creationId xmlns:p14="http://schemas.microsoft.com/office/powerpoint/2010/main" val="465744101"/>
       </p:ext>
     </p:extLst>
   </p:cSld>
@@ -5362,7 +5356,7 @@
                                   <p:childTnLst>
                                     <p:cmd type="call" cmd="playFrom(0.0)">
                                       <p:cBhvr>
-                                        <p:cTn id="6" dur="6451" fill="hold"/>
+                                        <p:cTn id="6" dur="6076" fill="hold"/>
                                         <p:tgtEl>
                                           <p:spTgt spid="6"/>
                                         </p:tgtEl>
@@ -5443,7 +5437,7 @@
           <p:cNvPr id="2" name="テキスト ボックス 1">
             <a:extLst>
               <a:ext uri="{FF2B5EF4-FFF2-40B4-BE49-F238E27FC236}">
-                <a16:creationId xmlns:a16="http://schemas.microsoft.com/office/drawing/2014/main" id="{7C6B824C-9B10-D9FD-A527-31BD3663FAB6}"/>
+                <a16:creationId xmlns:a16="http://schemas.microsoft.com/office/drawing/2014/main" id="{A89DDEE8-2E75-76AA-643B-C01244773A50}"/>
               </a:ext>
             </a:extLst>
           </p:cNvPr>
@@ -5489,7 +5483,7 @@
           <p:cNvPr id="3" name="テキスト ボックス 2">
             <a:extLst>
               <a:ext uri="{FF2B5EF4-FFF2-40B4-BE49-F238E27FC236}">
-                <a16:creationId xmlns:a16="http://schemas.microsoft.com/office/drawing/2014/main" id="{E19F1715-9214-F794-41FE-F9973DB34B36}"/>
+                <a16:creationId xmlns:a16="http://schemas.microsoft.com/office/drawing/2014/main" id="{B477798B-B51B-E860-C76A-C5D672356853}"/>
               </a:ext>
             </a:extLst>
           </p:cNvPr>
@@ -5529,7 +5523,7 @@
           <p:cNvPr id="4" name="テキスト ボックス 3">
             <a:extLst>
               <a:ext uri="{FF2B5EF4-FFF2-40B4-BE49-F238E27FC236}">
-                <a16:creationId xmlns:a16="http://schemas.microsoft.com/office/drawing/2014/main" id="{B5277A21-0522-6B6F-74B6-174561C87EEF}"/>
+                <a16:creationId xmlns:a16="http://schemas.microsoft.com/office/drawing/2014/main" id="{C08D991C-DCDD-9490-8207-AC18CC44AAF7}"/>
               </a:ext>
             </a:extLst>
           </p:cNvPr>
@@ -5594,7 +5588,7 @@
           <p:cNvPr id="5" name="テキスト ボックス 4">
             <a:extLst>
               <a:ext uri="{FF2B5EF4-FFF2-40B4-BE49-F238E27FC236}">
-                <a16:creationId xmlns:a16="http://schemas.microsoft.com/office/drawing/2014/main" id="{58255DB5-677D-1DD6-946D-8C18D6316C11}"/>
+                <a16:creationId xmlns:a16="http://schemas.microsoft.com/office/drawing/2014/main" id="{0D2C871B-C050-26F3-D099-EBC06CE03601}"/>
               </a:ext>
             </a:extLst>
           </p:cNvPr>
@@ -5641,7 +5635,7 @@
             <a:hlinkClick r:id="" action="ppaction://media"/>
             <a:extLst>
               <a:ext uri="{FF2B5EF4-FFF2-40B4-BE49-F238E27FC236}">
-                <a16:creationId xmlns:a16="http://schemas.microsoft.com/office/drawing/2014/main" id="{E6FB5781-C33E-AC02-2F6B-ACF6CB123E99}"/>
+                <a16:creationId xmlns:a16="http://schemas.microsoft.com/office/drawing/2014/main" id="{C09BFC74-89E5-D566-9DC3-3C56237CE420}"/>
               </a:ext>
             </a:extLst>
           </p:cNvPr>
@@ -5676,7 +5670,7 @@
     </p:spTree>
     <p:extLst>
       <p:ext uri="{BB962C8B-B14F-4D97-AF65-F5344CB8AC3E}">
-        <p14:creationId xmlns:p14="http://schemas.microsoft.com/office/powerpoint/2010/main" val="3246750506"/>
+        <p14:creationId xmlns:p14="http://schemas.microsoft.com/office/powerpoint/2010/main" val="4163646223"/>
       </p:ext>
     </p:extLst>
   </p:cSld>
